--- a/deck/Alpaca Bot Deck.pptx
+++ b/deck/Alpaca Bot Deck.pptx
@@ -2852,6 +2852,10 @@
           </a:solidFill>
           <a:ln/>
         </p:spPr>
+        <p:txBody>
+          <a:bodyPr/>
+          <a:p/>
+        </p:txBody>
       </p:sp>
       <p:sp>
         <p:nvSpPr>
@@ -3117,6 +3121,10 @@
           </a:solidFill>
           <a:ln/>
         </p:spPr>
+        <p:txBody>
+          <a:bodyPr/>
+          <a:p/>
+        </p:txBody>
       </p:sp>
       <p:sp>
         <p:nvSpPr>
@@ -3251,6 +3259,10 @@
           </a:solidFill>
           <a:ln/>
         </p:spPr>
+        <p:txBody>
+          <a:bodyPr/>
+          <a:p/>
+        </p:txBody>
       </p:sp>
       <p:sp>
         <p:nvSpPr>
@@ -3271,6 +3283,10 @@
           </a:solidFill>
           <a:ln/>
         </p:spPr>
+        <p:txBody>
+          <a:bodyPr/>
+          <a:p/>
+        </p:txBody>
       </p:sp>
       <p:sp>
         <p:nvSpPr>
@@ -3507,6 +3523,10 @@
             <a:prstDash val="solid"/>
           </a:ln>
         </p:spPr>
+        <p:txBody>
+          <a:bodyPr/>
+          <a:p/>
+        </p:txBody>
       </p:sp>
       <p:sp>
         <p:nvSpPr>
@@ -3617,6 +3637,10 @@
             <a:prstDash val="solid"/>
           </a:ln>
         </p:spPr>
+        <p:txBody>
+          <a:bodyPr/>
+          <a:p/>
+        </p:txBody>
       </p:sp>
       <p:sp>
         <p:nvSpPr>
@@ -3722,6 +3746,10 @@
           </a:solidFill>
           <a:ln/>
         </p:spPr>
+        <p:txBody>
+          <a:bodyPr/>
+          <a:p/>
+        </p:txBody>
       </p:sp>
       <p:sp>
         <p:nvSpPr>
@@ -3827,6 +3855,10 @@
           </a:solidFill>
           <a:ln/>
         </p:spPr>
+        <p:txBody>
+          <a:bodyPr/>
+          <a:p/>
+        </p:txBody>
       </p:sp>
       <p:sp>
         <p:nvSpPr>
@@ -3932,6 +3964,10 @@
           </a:solidFill>
           <a:ln/>
         </p:spPr>
+        <p:txBody>
+          <a:bodyPr/>
+          <a:p/>
+        </p:txBody>
       </p:sp>
       <p:sp>
         <p:nvSpPr>
@@ -4037,6 +4073,10 @@
           </a:solidFill>
           <a:ln/>
         </p:spPr>
+        <p:txBody>
+          <a:bodyPr/>
+          <a:p/>
+        </p:txBody>
       </p:sp>
       <p:sp>
         <p:nvSpPr>
@@ -4147,6 +4187,10 @@
             <a:prstDash val="solid"/>
           </a:ln>
         </p:spPr>
+        <p:txBody>
+          <a:bodyPr/>
+          <a:p/>
+        </p:txBody>
       </p:sp>
       <p:sp>
         <p:nvSpPr>
@@ -4213,6 +4257,10 @@
             <a:prstDash val="solid"/>
           </a:ln>
         </p:spPr>
+        <p:txBody>
+          <a:bodyPr/>
+          <a:p/>
+        </p:txBody>
       </p:sp>
       <p:sp>
         <p:nvSpPr>
@@ -4233,6 +4281,10 @@
           </a:solidFill>
           <a:ln/>
         </p:spPr>
+        <p:txBody>
+          <a:bodyPr/>
+          <a:p/>
+        </p:txBody>
       </p:sp>
       <p:sp>
         <p:nvSpPr>
@@ -4367,6 +4419,10 @@
           </a:solidFill>
           <a:ln/>
         </p:spPr>
+        <p:txBody>
+          <a:bodyPr/>
+          <a:p/>
+        </p:txBody>
       </p:sp>
       <p:sp>
         <p:nvSpPr>
@@ -4387,6 +4443,10 @@
           </a:solidFill>
           <a:ln/>
         </p:spPr>
+        <p:txBody>
+          <a:bodyPr/>
+          <a:p/>
+        </p:txBody>
       </p:sp>
       <p:sp>
         <p:nvSpPr>
@@ -4538,6 +4598,10 @@
             <a:prstDash val="solid"/>
           </a:ln>
         </p:spPr>
+        <p:txBody>
+          <a:bodyPr/>
+          <a:p/>
+        </p:txBody>
       </p:sp>
       <p:sp>
         <p:nvSpPr>
@@ -5121,6 +5185,10 @@
           </a:solidFill>
           <a:ln/>
         </p:spPr>
+        <p:txBody>
+          <a:bodyPr/>
+          <a:p/>
+        </p:txBody>
       </p:sp>
       <p:sp>
         <p:nvSpPr>
@@ -5321,6 +5389,10 @@
           </a:solidFill>
           <a:ln/>
         </p:spPr>
+        <p:txBody>
+          <a:bodyPr/>
+          <a:p/>
+        </p:txBody>
       </p:sp>
       <p:sp>
         <p:nvSpPr>
@@ -5469,6 +5541,10 @@
             <a:prstDash val="solid"/>
           </a:ln>
         </p:spPr>
+        <p:txBody>
+          <a:bodyPr/>
+          <a:p/>
+        </p:txBody>
       </p:sp>
       <p:sp>
         <p:nvSpPr>
@@ -5489,6 +5565,10 @@
           </a:solidFill>
           <a:ln/>
         </p:spPr>
+        <p:txBody>
+          <a:bodyPr/>
+          <a:p/>
+        </p:txBody>
       </p:sp>
       <p:sp>
         <p:nvSpPr>
@@ -5509,6 +5589,10 @@
           </a:solidFill>
           <a:ln/>
         </p:spPr>
+        <p:txBody>
+          <a:bodyPr/>
+          <a:p/>
+        </p:txBody>
       </p:sp>
       <p:sp>
         <p:nvSpPr>
@@ -5657,6 +5741,10 @@
             <a:prstDash val="solid"/>
           </a:ln>
         </p:spPr>
+        <p:txBody>
+          <a:bodyPr/>
+          <a:p/>
+        </p:txBody>
       </p:sp>
       <p:sp>
         <p:nvSpPr>
@@ -5677,6 +5765,10 @@
           </a:solidFill>
           <a:ln/>
         </p:spPr>
+        <p:txBody>
+          <a:bodyPr/>
+          <a:p/>
+        </p:txBody>
       </p:sp>
       <p:sp>
         <p:nvSpPr>
@@ -5697,6 +5789,10 @@
           </a:solidFill>
           <a:ln/>
         </p:spPr>
+        <p:txBody>
+          <a:bodyPr/>
+          <a:p/>
+        </p:txBody>
       </p:sp>
       <p:sp>
         <p:nvSpPr>
@@ -5845,6 +5941,10 @@
             <a:prstDash val="solid"/>
           </a:ln>
         </p:spPr>
+        <p:txBody>
+          <a:bodyPr/>
+          <a:p/>
+        </p:txBody>
       </p:sp>
       <p:sp>
         <p:nvSpPr>
@@ -5865,6 +5965,10 @@
           </a:solidFill>
           <a:ln/>
         </p:spPr>
+        <p:txBody>
+          <a:bodyPr/>
+          <a:p/>
+        </p:txBody>
       </p:sp>
       <p:sp>
         <p:nvSpPr>
@@ -5885,6 +5989,10 @@
           </a:solidFill>
           <a:ln/>
         </p:spPr>
+        <p:txBody>
+          <a:bodyPr/>
+          <a:p/>
+        </p:txBody>
       </p:sp>
       <p:sp>
         <p:nvSpPr>
@@ -6033,6 +6141,10 @@
             <a:prstDash val="solid"/>
           </a:ln>
         </p:spPr>
+        <p:txBody>
+          <a:bodyPr/>
+          <a:p/>
+        </p:txBody>
       </p:sp>
       <p:sp>
         <p:nvSpPr>
@@ -6053,6 +6165,10 @@
           </a:solidFill>
           <a:ln/>
         </p:spPr>
+        <p:txBody>
+          <a:bodyPr/>
+          <a:p/>
+        </p:txBody>
       </p:sp>
       <p:sp>
         <p:nvSpPr>
@@ -6201,6 +6317,10 @@
             <a:prstDash val="solid"/>
           </a:ln>
         </p:spPr>
+        <p:txBody>
+          <a:bodyPr/>
+          <a:p/>
+        </p:txBody>
       </p:sp>
       <p:sp>
         <p:nvSpPr>
@@ -6221,6 +6341,10 @@
           </a:solidFill>
           <a:ln/>
         </p:spPr>
+        <p:txBody>
+          <a:bodyPr/>
+          <a:p/>
+        </p:txBody>
       </p:sp>
       <p:sp>
         <p:nvSpPr>
@@ -6355,6 +6479,10 @@
           </a:solidFill>
           <a:ln/>
         </p:spPr>
+        <p:txBody>
+          <a:bodyPr/>
+          <a:p/>
+        </p:txBody>
       </p:sp>
       <p:sp>
         <p:nvSpPr>
@@ -6375,6 +6503,10 @@
           </a:solidFill>
           <a:ln/>
         </p:spPr>
+        <p:txBody>
+          <a:bodyPr/>
+          <a:p/>
+        </p:txBody>
       </p:sp>
       <p:sp>
         <p:nvSpPr>
@@ -6526,6 +6658,10 @@
             <a:prstDash val="solid"/>
           </a:ln>
         </p:spPr>
+        <p:txBody>
+          <a:bodyPr/>
+          <a:p/>
+        </p:txBody>
       </p:sp>
       <p:sp>
         <p:nvSpPr>
@@ -6677,6 +6813,10 @@
             <a:prstDash val="solid"/>
           </a:ln>
         </p:spPr>
+        <p:txBody>
+          <a:bodyPr/>
+          <a:p/>
+        </p:txBody>
       </p:sp>
       <p:sp>
         <p:nvSpPr>
@@ -6828,6 +6968,10 @@
             <a:prstDash val="solid"/>
           </a:ln>
         </p:spPr>
+        <p:txBody>
+          <a:bodyPr/>
+          <a:p/>
+        </p:txBody>
       </p:sp>
       <p:sp>
         <p:nvSpPr>
@@ -7258,6 +7402,10 @@
           </a:solidFill>
           <a:ln/>
         </p:spPr>
+        <p:txBody>
+          <a:bodyPr/>
+          <a:p/>
+        </p:txBody>
       </p:sp>
       <p:sp>
         <p:nvSpPr>
@@ -7278,6 +7426,10 @@
           </a:solidFill>
           <a:ln/>
         </p:spPr>
+        <p:txBody>
+          <a:bodyPr/>
+          <a:p/>
+        </p:txBody>
       </p:sp>
       <p:sp>
         <p:nvSpPr>
@@ -7514,6 +7666,10 @@
             <a:prstDash val="solid"/>
           </a:ln>
         </p:spPr>
+        <p:txBody>
+          <a:bodyPr/>
+          <a:p/>
+        </p:txBody>
       </p:sp>
       <p:sp>
         <p:nvSpPr>
@@ -7665,6 +7821,10 @@
             <a:prstDash val="solid"/>
           </a:ln>
         </p:spPr>
+        <p:txBody>
+          <a:bodyPr/>
+          <a:p/>
+        </p:txBody>
       </p:sp>
       <p:sp>
         <p:nvSpPr>
@@ -7816,6 +7976,10 @@
             <a:prstDash val="solid"/>
           </a:ln>
         </p:spPr>
+        <p:txBody>
+          <a:bodyPr/>
+          <a:p/>
+        </p:txBody>
       </p:sp>
       <p:sp>
         <p:nvSpPr>
@@ -7967,6 +8131,10 @@
             <a:prstDash val="solid"/>
           </a:ln>
         </p:spPr>
+        <p:txBody>
+          <a:bodyPr/>
+          <a:p/>
+        </p:txBody>
       </p:sp>
       <p:sp>
         <p:nvSpPr>
@@ -8159,6 +8327,10 @@
             <a:prstDash val="solid"/>
           </a:ln>
         </p:spPr>
+        <p:txBody>
+          <a:bodyPr/>
+          <a:p/>
+        </p:txBody>
       </p:sp>
       <p:sp>
         <p:nvSpPr>
@@ -8310,6 +8482,10 @@
             <a:prstDash val="solid"/>
           </a:ln>
         </p:spPr>
+        <p:txBody>
+          <a:bodyPr/>
+          <a:p/>
+        </p:txBody>
       </p:sp>
       <p:sp>
         <p:nvSpPr>
@@ -8461,6 +8637,10 @@
             <a:prstDash val="solid"/>
           </a:ln>
         </p:spPr>
+        <p:txBody>
+          <a:bodyPr/>
+          <a:p/>
+        </p:txBody>
       </p:sp>
       <p:sp>
         <p:nvSpPr>
@@ -8612,6 +8792,10 @@
             <a:prstDash val="solid"/>
           </a:ln>
         </p:spPr>
+        <p:txBody>
+          <a:bodyPr/>
+          <a:p/>
+        </p:txBody>
       </p:sp>
       <p:sp>
         <p:nvSpPr>
@@ -8804,6 +8988,10 @@
             <a:prstDash val="solid"/>
           </a:ln>
         </p:spPr>
+        <p:txBody>
+          <a:bodyPr/>
+          <a:p/>
+        </p:txBody>
       </p:sp>
       <p:sp>
         <p:nvSpPr>
@@ -8955,6 +9143,10 @@
             <a:prstDash val="solid"/>
           </a:ln>
         </p:spPr>
+        <p:txBody>
+          <a:bodyPr/>
+          <a:p/>
+        </p:txBody>
       </p:sp>
       <p:sp>
         <p:nvSpPr>
@@ -9106,6 +9298,10 @@
             <a:prstDash val="solid"/>
           </a:ln>
         </p:spPr>
+        <p:txBody>
+          <a:bodyPr/>
+          <a:p/>
+        </p:txBody>
       </p:sp>
       <p:sp>
         <p:nvSpPr>
@@ -9257,6 +9453,10 @@
             <a:prstDash val="solid"/>
           </a:ln>
         </p:spPr>
+        <p:txBody>
+          <a:bodyPr/>
+          <a:p/>
+        </p:txBody>
       </p:sp>
       <p:sp>
         <p:nvSpPr>
@@ -9517,6 +9717,10 @@
           </a:solidFill>
           <a:ln/>
         </p:spPr>
+        <p:txBody>
+          <a:bodyPr/>
+          <a:p/>
+        </p:txBody>
       </p:sp>
       <p:sp>
         <p:nvSpPr>
@@ -9537,6 +9741,10 @@
           </a:solidFill>
           <a:ln/>
         </p:spPr>
+        <p:txBody>
+          <a:bodyPr/>
+          <a:p/>
+        </p:txBody>
       </p:sp>
       <p:sp>
         <p:nvSpPr>
@@ -9800,6 +10008,10 @@
             <a:prstDash val="solid"/>
           </a:ln>
         </p:spPr>
+        <p:txBody>
+          <a:bodyPr/>
+          <a:p/>
+        </p:txBody>
       </p:sp>
       <p:sp>
         <p:nvSpPr>
@@ -9995,6 +10207,10 @@
             <a:prstDash val="solid"/>
           </a:ln>
         </p:spPr>
+        <p:txBody>
+          <a:bodyPr/>
+          <a:p/>
+        </p:txBody>
       </p:sp>
       <p:sp>
         <p:nvSpPr>
@@ -10190,6 +10406,10 @@
             <a:prstDash val="solid"/>
           </a:ln>
         </p:spPr>
+        <p:txBody>
+          <a:bodyPr/>
+          <a:p/>
+        </p:txBody>
       </p:sp>
       <p:sp>
         <p:nvSpPr>
@@ -10385,6 +10605,10 @@
             <a:prstDash val="solid"/>
           </a:ln>
         </p:spPr>
+        <p:txBody>
+          <a:bodyPr/>
+          <a:p/>
+        </p:txBody>
       </p:sp>
       <p:sp>
         <p:nvSpPr>
@@ -10580,6 +10804,10 @@
             <a:prstDash val="solid"/>
           </a:ln>
         </p:spPr>
+        <p:txBody>
+          <a:bodyPr/>
+          <a:p/>
+        </p:txBody>
       </p:sp>
       <p:sp>
         <p:nvSpPr>
@@ -10775,6 +11003,10 @@
             <a:prstDash val="solid"/>
           </a:ln>
         </p:spPr>
+        <p:txBody>
+          <a:bodyPr/>
+          <a:p/>
+        </p:txBody>
       </p:sp>
       <p:sp>
         <p:nvSpPr>
@@ -10970,6 +11202,10 @@
             <a:prstDash val="solid"/>
           </a:ln>
         </p:spPr>
+        <p:txBody>
+          <a:bodyPr/>
+          <a:p/>
+        </p:txBody>
       </p:sp>
       <p:sp>
         <p:nvSpPr>
@@ -11165,6 +11401,10 @@
             <a:prstDash val="solid"/>
           </a:ln>
         </p:spPr>
+        <p:txBody>
+          <a:bodyPr/>
+          <a:p/>
+        </p:txBody>
       </p:sp>
       <p:sp>
         <p:nvSpPr>
@@ -11469,6 +11709,10 @@
           </a:solidFill>
           <a:ln/>
         </p:spPr>
+        <p:txBody>
+          <a:bodyPr/>
+          <a:p/>
+        </p:txBody>
       </p:sp>
       <p:sp>
         <p:nvSpPr>
@@ -11489,6 +11733,10 @@
           </a:solidFill>
           <a:ln/>
         </p:spPr>
+        <p:txBody>
+          <a:bodyPr/>
+          <a:p/>
+        </p:txBody>
       </p:sp>
       <p:sp>
         <p:nvSpPr>
@@ -11679,6 +11927,10 @@
           </a:solidFill>
           <a:ln/>
         </p:spPr>
+        <p:txBody>
+          <a:bodyPr/>
+          <a:p/>
+        </p:txBody>
       </p:sp>
       <p:sp>
         <p:nvSpPr>
@@ -11752,6 +12004,10 @@
             </a:outerShdw>
           </a:effectLst>
         </p:spPr>
+        <p:txBody>
+          <a:bodyPr/>
+          <a:p/>
+        </p:txBody>
       </p:sp>
       <p:sp>
         <p:nvSpPr>
@@ -11910,6 +12166,10 @@
             </a:outerShdw>
           </a:effectLst>
         </p:spPr>
+        <p:txBody>
+          <a:bodyPr/>
+          <a:p/>
+        </p:txBody>
       </p:sp>
       <p:sp>
         <p:nvSpPr>
@@ -12068,6 +12328,10 @@
             </a:outerShdw>
           </a:effectLst>
         </p:spPr>
+        <p:txBody>
+          <a:bodyPr/>
+          <a:p/>
+        </p:txBody>
       </p:sp>
       <p:sp>
         <p:nvSpPr>
@@ -12226,6 +12490,10 @@
             </a:outerShdw>
           </a:effectLst>
         </p:spPr>
+        <p:txBody>
+          <a:bodyPr/>
+          <a:p/>
+        </p:txBody>
       </p:sp>
       <p:sp>
         <p:nvSpPr>
@@ -12384,6 +12652,10 @@
             </a:outerShdw>
           </a:effectLst>
         </p:spPr>
+        <p:txBody>
+          <a:bodyPr/>
+          <a:p/>
+        </p:txBody>
       </p:sp>
       <p:sp>
         <p:nvSpPr>
@@ -12542,6 +12814,10 @@
             </a:outerShdw>
           </a:effectLst>
         </p:spPr>
+        <p:txBody>
+          <a:bodyPr/>
+          <a:p/>
+        </p:txBody>
       </p:sp>
       <p:sp>
         <p:nvSpPr>
@@ -12761,6 +13037,10 @@
           </a:solidFill>
           <a:ln/>
         </p:spPr>
+        <p:txBody>
+          <a:bodyPr/>
+          <a:p/>
+        </p:txBody>
       </p:sp>
       <p:sp>
         <p:nvSpPr>
@@ -12781,6 +13061,10 @@
           </a:solidFill>
           <a:ln/>
         </p:spPr>
+        <p:txBody>
+          <a:bodyPr/>
+          <a:p/>
+        </p:txBody>
       </p:sp>
       <p:sp>
         <p:nvSpPr>
@@ -12927,6 +13211,10 @@
           </a:solidFill>
           <a:ln/>
         </p:spPr>
+        <p:txBody>
+          <a:bodyPr/>
+          <a:p/>
+        </p:txBody>
       </p:sp>
       <p:sp>
         <p:nvSpPr>
@@ -12947,6 +13235,10 @@
           </a:solidFill>
           <a:ln/>
         </p:spPr>
+        <p:txBody>
+          <a:bodyPr/>
+          <a:p/>
+        </p:txBody>
       </p:sp>
       <p:sp>
         <p:nvSpPr>
@@ -13090,6 +13382,10 @@
           </a:solidFill>
           <a:ln/>
         </p:spPr>
+        <p:txBody>
+          <a:bodyPr/>
+          <a:p/>
+        </p:txBody>
       </p:sp>
       <p:sp>
         <p:nvSpPr>
@@ -13233,6 +13529,10 @@
           </a:solidFill>
           <a:ln/>
         </p:spPr>
+        <p:txBody>
+          <a:bodyPr/>
+          <a:p/>
+        </p:txBody>
       </p:sp>
       <p:sp>
         <p:nvSpPr>
@@ -13376,6 +13676,10 @@
           </a:solidFill>
           <a:ln/>
         </p:spPr>
+        <p:txBody>
+          <a:bodyPr/>
+          <a:p/>
+        </p:txBody>
       </p:sp>
       <p:sp>
         <p:nvSpPr>
@@ -13519,6 +13823,10 @@
           </a:solidFill>
           <a:ln/>
         </p:spPr>
+        <p:txBody>
+          <a:bodyPr/>
+          <a:p/>
+        </p:txBody>
       </p:sp>
       <p:sp>
         <p:nvSpPr>
@@ -13662,6 +13970,10 @@
           </a:solidFill>
           <a:ln/>
         </p:spPr>
+        <p:txBody>
+          <a:bodyPr/>
+          <a:p/>
+        </p:txBody>
       </p:sp>
       <p:sp>
         <p:nvSpPr>
@@ -13805,6 +14117,10 @@
           </a:solidFill>
           <a:ln/>
         </p:spPr>
+        <p:txBody>
+          <a:bodyPr/>
+          <a:p/>
+        </p:txBody>
       </p:sp>
       <p:sp>
         <p:nvSpPr>
@@ -14062,6 +14378,10 @@
           </a:solidFill>
           <a:ln/>
         </p:spPr>
+        <p:txBody>
+          <a:bodyPr/>
+          <a:p/>
+        </p:txBody>
       </p:sp>
       <p:sp>
         <p:nvSpPr>
@@ -14082,6 +14402,10 @@
           </a:solidFill>
           <a:ln/>
         </p:spPr>
+        <p:txBody>
+          <a:bodyPr/>
+          <a:p/>
+        </p:txBody>
       </p:sp>
       <p:sp>
         <p:nvSpPr>
@@ -14277,6 +14601,10 @@
             <a:prstDash val="solid"/>
           </a:ln>
         </p:spPr>
+        <p:txBody>
+          <a:bodyPr/>
+          <a:p/>
+        </p:txBody>
       </p:sp>
       <p:sp>
         <p:nvSpPr>
@@ -14425,6 +14753,10 @@
             <a:prstDash val="solid"/>
           </a:ln>
         </p:spPr>
+        <p:txBody>
+          <a:bodyPr/>
+          <a:p/>
+        </p:txBody>
       </p:sp>
       <p:sp>
         <p:nvSpPr>
@@ -14573,6 +14905,10 @@
             <a:prstDash val="solid"/>
           </a:ln>
         </p:spPr>
+        <p:txBody>
+          <a:bodyPr/>
+          <a:p/>
+        </p:txBody>
       </p:sp>
       <p:sp>
         <p:nvSpPr>
@@ -14721,6 +15057,10 @@
             <a:prstDash val="solid"/>
           </a:ln>
         </p:spPr>
+        <p:txBody>
+          <a:bodyPr/>
+          <a:p/>
+        </p:txBody>
       </p:sp>
       <p:sp>
         <p:nvSpPr>
@@ -14869,6 +15209,10 @@
             <a:prstDash val="solid"/>
           </a:ln>
         </p:spPr>
+        <p:txBody>
+          <a:bodyPr/>
+          <a:p/>
+        </p:txBody>
       </p:sp>
       <p:sp>
         <p:nvSpPr>
@@ -15126,6 +15470,10 @@
           </a:solidFill>
           <a:ln/>
         </p:spPr>
+        <p:txBody>
+          <a:bodyPr/>
+          <a:p/>
+        </p:txBody>
       </p:sp>
       <p:sp>
         <p:nvSpPr>
@@ -15146,6 +15494,10 @@
           </a:solidFill>
           <a:ln/>
         </p:spPr>
+        <p:txBody>
+          <a:bodyPr/>
+          <a:p/>
+        </p:txBody>
       </p:sp>
       <p:sp>
         <p:nvSpPr>
@@ -15341,6 +15693,10 @@
             <a:prstDash val="solid"/>
           </a:ln>
         </p:spPr>
+        <p:txBody>
+          <a:bodyPr/>
+          <a:p/>
+        </p:txBody>
       </p:sp>
       <p:sp>
         <p:nvSpPr>
@@ -15361,6 +15717,10 @@
           </a:solidFill>
           <a:ln/>
         </p:spPr>
+        <p:txBody>
+          <a:bodyPr/>
+          <a:p/>
+        </p:txBody>
       </p:sp>
       <p:sp>
         <p:nvSpPr>
@@ -15381,6 +15741,10 @@
           </a:solidFill>
           <a:ln/>
         </p:spPr>
+        <p:txBody>
+          <a:bodyPr/>
+          <a:p/>
+        </p:txBody>
       </p:sp>
       <p:sp>
         <p:nvSpPr>
@@ -15401,6 +15765,10 @@
           </a:solidFill>
           <a:ln/>
         </p:spPr>
+        <p:txBody>
+          <a:bodyPr/>
+          <a:p/>
+        </p:txBody>
       </p:sp>
       <p:sp>
         <p:nvSpPr>
@@ -15421,6 +15789,10 @@
           </a:solidFill>
           <a:ln/>
         </p:spPr>
+        <p:txBody>
+          <a:bodyPr/>
+          <a:p/>
+        </p:txBody>
       </p:sp>
       <p:sp>
         <p:nvSpPr>
@@ -15441,6 +15813,10 @@
           </a:solidFill>
           <a:ln/>
         </p:spPr>
+        <p:txBody>
+          <a:bodyPr/>
+          <a:p/>
+        </p:txBody>
       </p:sp>
       <p:sp>
         <p:nvSpPr>
@@ -15600,7 +15976,7 @@
                 <a:ea typeface="Georgia" pitchFamily="34" charset="-122"/>
                 <a:cs typeface="Georgia" pitchFamily="34" charset="-120"/>
               </a:rPr>
-              <a:t>$104,217.83</a:t>
+              <a:t>$104,217.102</a:t>
             </a:r>
             <a:endParaRPr lang="en-US" sz="5400" dirty="0"/>
           </a:p>
@@ -15641,7 +16017,7 @@
                 <a:ea typeface="Courier New" pitchFamily="34" charset="-122"/>
                 <a:cs typeface="Courier New" pitchFamily="34" charset="-120"/>
               </a:rPr>
-              <a:t>+ $4,217.83 · + 4.22 %</a:t>
+              <a:t>+ $4,217.102 · + 4.22 %</a:t>
             </a:r>
             <a:endParaRPr lang="en-US" sz="1950" dirty="0"/>
           </a:p>
@@ -15671,6 +16047,10 @@
             <a:prstDash val="solid"/>
           </a:ln>
         </p:spPr>
+        <p:txBody>
+          <a:bodyPr/>
+          <a:p/>
+        </p:txBody>
       </p:sp>
       <p:sp>
         <p:nvSpPr>
@@ -15819,6 +16199,10 @@
             <a:prstDash val="solid"/>
           </a:ln>
         </p:spPr>
+        <p:txBody>
+          <a:bodyPr/>
+          <a:p/>
+        </p:txBody>
       </p:sp>
       <p:sp>
         <p:nvSpPr>
@@ -15967,6 +16351,10 @@
             <a:prstDash val="solid"/>
           </a:ln>
         </p:spPr>
+        <p:txBody>
+          <a:bodyPr/>
+          <a:p/>
+        </p:txBody>
       </p:sp>
       <p:sp>
         <p:nvSpPr>
@@ -16115,6 +16503,10 @@
             <a:prstDash val="solid"/>
           </a:ln>
         </p:spPr>
+        <p:txBody>
+          <a:bodyPr/>
+          <a:p/>
+        </p:txBody>
       </p:sp>
       <p:sp>
         <p:nvSpPr>
@@ -16240,6 +16632,10 @@
           </a:solidFill>
           <a:ln/>
         </p:spPr>
+        <p:txBody>
+          <a:bodyPr/>
+          <a:p/>
+        </p:txBody>
       </p:sp>
       <p:sp>
         <p:nvSpPr>
@@ -16383,6 +16779,10 @@
           </a:solidFill>
           <a:ln/>
         </p:spPr>
+        <p:txBody>
+          <a:bodyPr/>
+          <a:p/>
+        </p:txBody>
       </p:sp>
       <p:sp>
         <p:nvSpPr>
@@ -16526,6 +16926,10 @@
           </a:solidFill>
           <a:ln/>
         </p:spPr>
+        <p:txBody>
+          <a:bodyPr/>
+          <a:p/>
+        </p:txBody>
       </p:sp>
       <p:sp>
         <p:nvSpPr>
@@ -16669,6 +17073,10 @@
           </a:solidFill>
           <a:ln/>
         </p:spPr>
+        <p:txBody>
+          <a:bodyPr/>
+          <a:p/>
+        </p:txBody>
       </p:sp>
       <p:sp>
         <p:nvSpPr>
@@ -16812,6 +17220,10 @@
           </a:solidFill>
           <a:ln/>
         </p:spPr>
+        <p:txBody>
+          <a:bodyPr/>
+          <a:p/>
+        </p:txBody>
       </p:sp>
       <p:sp>
         <p:nvSpPr>
@@ -17069,6 +17481,10 @@
           </a:solidFill>
           <a:ln/>
         </p:spPr>
+        <p:txBody>
+          <a:bodyPr/>
+          <a:p/>
+        </p:txBody>
       </p:sp>
       <p:sp>
         <p:nvSpPr>
@@ -17089,6 +17505,10 @@
           </a:solidFill>
           <a:ln/>
         </p:spPr>
+        <p:txBody>
+          <a:bodyPr/>
+          <a:p/>
+        </p:txBody>
       </p:sp>
       <p:sp>
         <p:nvSpPr>
@@ -17240,6 +17660,10 @@
             <a:prstDash val="solid"/>
           </a:ln>
         </p:spPr>
+        <p:txBody>
+          <a:bodyPr/>
+          <a:p/>
+        </p:txBody>
       </p:sp>
       <p:sp>
         <p:nvSpPr>
@@ -17435,6 +17859,10 @@
             <a:prstDash val="solid"/>
           </a:ln>
         </p:spPr>
+        <p:txBody>
+          <a:bodyPr/>
+          <a:p/>
+        </p:txBody>
       </p:sp>
       <p:sp>
         <p:nvSpPr>
@@ -17630,6 +18058,10 @@
             <a:prstDash val="solid"/>
           </a:ln>
         </p:spPr>
+        <p:txBody>
+          <a:bodyPr/>
+          <a:p/>
+        </p:txBody>
       </p:sp>
       <p:sp>
         <p:nvSpPr>
@@ -17710,7 +18142,7 @@
                 <a:ea typeface="Georgia" pitchFamily="34" charset="-122"/>
                 <a:cs typeface="Georgia" pitchFamily="34" charset="-120"/>
               </a:rPr>
-              <a:t>Headlines only, no article bodies</a:t>
+              <a:t>No paywalled wires</a:t>
             </a:r>
             <a:endParaRPr lang="en-US" sz="2400" dirty="0"/>
           </a:p>
@@ -17754,7 +18186,7 @@
                 <a:ea typeface="Arial" pitchFamily="34" charset="-122"/>
                 <a:cs typeface="Arial" pitchFamily="34" charset="-120"/>
               </a:rPr>
-              <a:t>We only read RSS, not the articles behind them. A careful headline can miss crucial context in paragraph four.</a:t>
+              <a:t>We fetch full article bodies for every headline that tags a universe ticker (CNBC, Yahoo, MarketWatch, CNN Business, Seeking Alpha) via trafilatura. Paywalled outlets like Bloomberg and WSJ remain out of reach.</a:t>
             </a:r>
             <a:endParaRPr lang="en-US" sz="1650" dirty="0"/>
           </a:p>
@@ -17795,7 +18227,7 @@
                 <a:ea typeface="Courier New" pitchFamily="34" charset="-122"/>
                 <a:cs typeface="Courier New" pitchFamily="34" charset="-120"/>
               </a:rPr>
-              <a:t>→ Unavoidable without paid licenses; VADER on headlines still has signal.</a:t>
+              <a:t>→ Body‑level VADER is a meaningful upgrade over headlines alone.</a:t>
             </a:r>
             <a:endParaRPr lang="en-US" sz="1500" dirty="0"/>
           </a:p>
@@ -17825,6 +18257,10 @@
             <a:prstDash val="solid"/>
           </a:ln>
         </p:spPr>
+        <p:txBody>
+          <a:bodyPr/>
+          <a:p/>
+        </p:txBody>
       </p:sp>
       <p:sp>
         <p:nvSpPr>
@@ -18020,6 +18456,10 @@
             <a:prstDash val="solid"/>
           </a:ln>
         </p:spPr>
+        <p:txBody>
+          <a:bodyPr/>
+          <a:p/>
+        </p:txBody>
       </p:sp>
       <p:sp>
         <p:nvSpPr>
@@ -18215,6 +18655,10 @@
             <a:prstDash val="solid"/>
           </a:ln>
         </p:spPr>
+        <p:txBody>
+          <a:bodyPr/>
+          <a:p/>
+        </p:txBody>
       </p:sp>
       <p:sp>
         <p:nvSpPr>
@@ -18519,6 +18963,10 @@
           </a:solidFill>
           <a:ln/>
         </p:spPr>
+        <p:txBody>
+          <a:bodyPr/>
+          <a:p/>
+        </p:txBody>
       </p:sp>
       <p:sp>
         <p:nvSpPr>
@@ -18539,6 +18987,10 @@
           </a:solidFill>
           <a:ln/>
         </p:spPr>
+        <p:txBody>
+          <a:bodyPr/>
+          <a:p/>
+        </p:txBody>
       </p:sp>
       <p:sp>
         <p:nvSpPr>
@@ -18685,6 +19137,10 @@
           </a:solidFill>
           <a:ln/>
         </p:spPr>
+        <p:txBody>
+          <a:bodyPr/>
+          <a:p/>
+        </p:txBody>
       </p:sp>
       <p:sp>
         <p:nvSpPr>
@@ -18705,6 +19161,10 @@
           </a:solidFill>
           <a:ln/>
         </p:spPr>
+        <p:txBody>
+          <a:bodyPr/>
+          <a:p/>
+        </p:txBody>
       </p:sp>
       <p:sp>
         <p:nvSpPr>
@@ -18889,6 +19349,10 @@
           </a:solidFill>
           <a:ln/>
         </p:spPr>
+        <p:txBody>
+          <a:bodyPr/>
+          <a:p/>
+        </p:txBody>
       </p:sp>
       <p:sp>
         <p:nvSpPr>
@@ -19073,6 +19537,10 @@
           </a:solidFill>
           <a:ln/>
         </p:spPr>
+        <p:txBody>
+          <a:bodyPr/>
+          <a:p/>
+        </p:txBody>
       </p:sp>
       <p:sp>
         <p:nvSpPr>
@@ -19257,6 +19725,10 @@
           </a:solidFill>
           <a:ln/>
         </p:spPr>
+        <p:txBody>
+          <a:bodyPr/>
+          <a:p/>
+        </p:txBody>
       </p:sp>
       <p:sp>
         <p:nvSpPr>
@@ -19555,6 +20027,10 @@
           </a:solidFill>
           <a:ln/>
         </p:spPr>
+        <p:txBody>
+          <a:bodyPr/>
+          <a:p/>
+        </p:txBody>
       </p:sp>
       <p:sp>
         <p:nvSpPr>
@@ -19575,6 +20051,10 @@
           </a:solidFill>
           <a:ln/>
         </p:spPr>
+        <p:txBody>
+          <a:bodyPr/>
+          <a:p/>
+        </p:txBody>
       </p:sp>
       <p:sp>
         <p:nvSpPr>
@@ -19765,6 +20245,10 @@
           </a:solidFill>
           <a:ln/>
         </p:spPr>
+        <p:txBody>
+          <a:bodyPr/>
+          <a:p/>
+        </p:txBody>
       </p:sp>
       <p:sp>
         <p:nvSpPr>
@@ -19785,6 +20269,10 @@
           </a:solidFill>
           <a:ln/>
         </p:spPr>
+        <p:txBody>
+          <a:bodyPr/>
+          <a:p/>
+        </p:txBody>
       </p:sp>
       <p:sp>
         <p:nvSpPr>
@@ -19972,6 +20460,10 @@
           </a:solidFill>
           <a:ln/>
         </p:spPr>
+        <p:txBody>
+          <a:bodyPr/>
+          <a:p/>
+        </p:txBody>
       </p:sp>
       <p:sp>
         <p:nvSpPr>
@@ -20159,6 +20651,10 @@
           </a:solidFill>
           <a:ln/>
         </p:spPr>
+        <p:txBody>
+          <a:bodyPr/>
+          <a:p/>
+        </p:txBody>
       </p:sp>
       <p:sp>
         <p:nvSpPr>
@@ -20346,6 +20842,10 @@
           </a:solidFill>
           <a:ln/>
         </p:spPr>
+        <p:txBody>
+          <a:bodyPr/>
+          <a:p/>
+        </p:txBody>
       </p:sp>
       <p:sp>
         <p:nvSpPr>
@@ -20533,6 +21033,10 @@
           </a:solidFill>
           <a:ln/>
         </p:spPr>
+        <p:txBody>
+          <a:bodyPr/>
+          <a:p/>
+        </p:txBody>
       </p:sp>
       <p:sp>
         <p:nvSpPr>
@@ -20834,6 +21338,10 @@
           </a:solidFill>
           <a:ln/>
         </p:spPr>
+        <p:txBody>
+          <a:bodyPr/>
+          <a:p/>
+        </p:txBody>
       </p:sp>
       <p:sp>
         <p:nvSpPr>
@@ -20854,6 +21362,10 @@
           </a:solidFill>
           <a:ln/>
         </p:spPr>
+        <p:txBody>
+          <a:bodyPr/>
+          <a:p/>
+        </p:txBody>
       </p:sp>
       <p:sp>
         <p:nvSpPr>
@@ -21044,6 +21556,10 @@
           </a:solidFill>
           <a:ln/>
         </p:spPr>
+        <p:txBody>
+          <a:bodyPr/>
+          <a:p/>
+        </p:txBody>
       </p:sp>
       <p:sp>
         <p:nvSpPr>
@@ -21064,6 +21580,10 @@
           </a:solidFill>
           <a:ln/>
         </p:spPr>
+        <p:txBody>
+          <a:bodyPr/>
+          <a:p/>
+        </p:txBody>
       </p:sp>
       <p:sp>
         <p:nvSpPr>
@@ -21251,6 +21771,10 @@
           </a:solidFill>
           <a:ln/>
         </p:spPr>
+        <p:txBody>
+          <a:bodyPr/>
+          <a:p/>
+        </p:txBody>
       </p:sp>
       <p:sp>
         <p:nvSpPr>
@@ -21438,6 +21962,10 @@
           </a:solidFill>
           <a:ln/>
         </p:spPr>
+        <p:txBody>
+          <a:bodyPr/>
+          <a:p/>
+        </p:txBody>
       </p:sp>
       <p:sp>
         <p:nvSpPr>
@@ -21559,7 +22087,7 @@
                 <a:ea typeface="Arial" pitchFamily="34" charset="-122"/>
                 <a:cs typeface="Arial" pitchFamily="34" charset="-120"/>
               </a:rPr>
-              <a:t>Lift the 83‑ticker cap; admit S&amp;P 1500 + liquid ETFs, gated by a liquidity filter so IEX sparseness stays tolerable.</a:t>
+              <a:t>Lift the 102‑ticker cap; admit S&amp;P 1500 + liquid ETFs, gated by a liquidity filter so IEX sparseness stays tolerable.</a:t>
             </a:r>
             <a:endParaRPr lang="en-US" sz="1950" dirty="0"/>
           </a:p>
@@ -21625,6 +22153,10 @@
           </a:solidFill>
           <a:ln/>
         </p:spPr>
+        <p:txBody>
+          <a:bodyPr/>
+          <a:p/>
+        </p:txBody>
       </p:sp>
       <p:sp>
         <p:nvSpPr>
@@ -21812,6 +22344,10 @@
           </a:solidFill>
           <a:ln/>
         </p:spPr>
+        <p:txBody>
+          <a:bodyPr/>
+          <a:p/>
+        </p:txBody>
       </p:sp>
       <p:sp>
         <p:nvSpPr>
@@ -22113,6 +22649,10 @@
           </a:solidFill>
           <a:ln/>
         </p:spPr>
+        <p:txBody>
+          <a:bodyPr/>
+          <a:p/>
+        </p:txBody>
       </p:sp>
       <p:sp>
         <p:nvSpPr>
@@ -22133,6 +22673,10 @@
           </a:solidFill>
           <a:ln/>
         </p:spPr>
+        <p:txBody>
+          <a:bodyPr/>
+          <a:p/>
+        </p:txBody>
       </p:sp>
       <p:sp>
         <p:nvSpPr>
@@ -22323,6 +22867,10 @@
           </a:solidFill>
           <a:ln/>
         </p:spPr>
+        <p:txBody>
+          <a:bodyPr/>
+          <a:p/>
+        </p:txBody>
       </p:sp>
       <p:sp>
         <p:nvSpPr>
@@ -22343,6 +22891,10 @@
           </a:solidFill>
           <a:ln/>
         </p:spPr>
+        <p:txBody>
+          <a:bodyPr/>
+          <a:p/>
+        </p:txBody>
       </p:sp>
       <p:sp>
         <p:nvSpPr>
@@ -22530,6 +23082,10 @@
           </a:solidFill>
           <a:ln/>
         </p:spPr>
+        <p:txBody>
+          <a:bodyPr/>
+          <a:p/>
+        </p:txBody>
       </p:sp>
       <p:sp>
         <p:nvSpPr>
@@ -22717,6 +23273,10 @@
           </a:solidFill>
           <a:ln/>
         </p:spPr>
+        <p:txBody>
+          <a:bodyPr/>
+          <a:p/>
+        </p:txBody>
       </p:sp>
       <p:sp>
         <p:nvSpPr>
@@ -22904,6 +23464,10 @@
           </a:solidFill>
           <a:ln/>
         </p:spPr>
+        <p:txBody>
+          <a:bodyPr/>
+          <a:p/>
+        </p:txBody>
       </p:sp>
       <p:sp>
         <p:nvSpPr>
@@ -23205,6 +23769,10 @@
           </a:solidFill>
           <a:ln/>
         </p:spPr>
+        <p:txBody>
+          <a:bodyPr/>
+          <a:p/>
+        </p:txBody>
       </p:sp>
       <p:sp>
         <p:nvSpPr>
@@ -23225,6 +23793,10 @@
           </a:solidFill>
           <a:ln/>
         </p:spPr>
+        <p:txBody>
+          <a:bodyPr/>
+          <a:p/>
+        </p:txBody>
       </p:sp>
       <p:sp>
         <p:nvSpPr>
@@ -23432,6 +24004,10 @@
           </a:solidFill>
           <a:ln/>
         </p:spPr>
+        <p:txBody>
+          <a:bodyPr/>
+          <a:p/>
+        </p:txBody>
       </p:sp>
       <p:sp>
         <p:nvSpPr>
@@ -23537,6 +24113,10 @@
           </a:solidFill>
           <a:ln/>
         </p:spPr>
+        <p:txBody>
+          <a:bodyPr/>
+          <a:p/>
+        </p:txBody>
       </p:sp>
       <p:sp>
         <p:nvSpPr>
@@ -23642,6 +24222,10 @@
           </a:solidFill>
           <a:ln/>
         </p:spPr>
+        <p:txBody>
+          <a:bodyPr/>
+          <a:p/>
+        </p:txBody>
       </p:sp>
       <p:sp>
         <p:nvSpPr>
@@ -23747,6 +24331,10 @@
           </a:solidFill>
           <a:ln/>
         </p:spPr>
+        <p:txBody>
+          <a:bodyPr/>
+          <a:p/>
+        </p:txBody>
       </p:sp>
       <p:sp>
         <p:nvSpPr>
@@ -24007,6 +24595,10 @@
           </a:solidFill>
           <a:ln/>
         </p:spPr>
+        <p:txBody>
+          <a:bodyPr/>
+          <a:p/>
+        </p:txBody>
       </p:sp>
       <p:sp>
         <p:nvSpPr>
@@ -24027,6 +24619,10 @@
           </a:solidFill>
           <a:ln/>
         </p:spPr>
+        <p:txBody>
+          <a:bodyPr/>
+          <a:p/>
+        </p:txBody>
       </p:sp>
       <p:sp>
         <p:nvSpPr>
@@ -24572,6 +25168,10 @@
           </a:solidFill>
           <a:ln/>
         </p:spPr>
+        <p:txBody>
+          <a:bodyPr/>
+          <a:p/>
+        </p:txBody>
       </p:sp>
       <p:sp>
         <p:nvSpPr>
@@ -24592,6 +25192,10 @@
           </a:solidFill>
           <a:ln/>
         </p:spPr>
+        <p:txBody>
+          <a:bodyPr/>
+          <a:p/>
+        </p:txBody>
       </p:sp>
       <p:sp>
         <p:nvSpPr>
@@ -24743,6 +25347,10 @@
             <a:prstDash val="solid"/>
           </a:ln>
         </p:spPr>
+        <p:txBody>
+          <a:bodyPr/>
+          <a:p/>
+        </p:txBody>
       </p:sp>
       <p:sp>
         <p:nvSpPr>
@@ -24897,6 +25505,10 @@
             <a:prstDash val="solid"/>
           </a:ln>
         </p:spPr>
+        <p:txBody>
+          <a:bodyPr/>
+          <a:p/>
+        </p:txBody>
       </p:sp>
       <p:sp>
         <p:nvSpPr>
@@ -25051,6 +25663,10 @@
             <a:prstDash val="solid"/>
           </a:ln>
         </p:spPr>
+        <p:txBody>
+          <a:bodyPr/>
+          <a:p/>
+        </p:txBody>
       </p:sp>
       <p:sp>
         <p:nvSpPr>
@@ -25205,6 +25821,10 @@
             <a:prstDash val="solid"/>
           </a:ln>
         </p:spPr>
+        <p:txBody>
+          <a:bodyPr/>
+          <a:p/>
+        </p:txBody>
       </p:sp>
       <p:sp>
         <p:nvSpPr>
@@ -25468,6 +26088,10 @@
           </a:solidFill>
           <a:ln/>
         </p:spPr>
+        <p:txBody>
+          <a:bodyPr/>
+          <a:p/>
+        </p:txBody>
       </p:sp>
       <p:sp>
         <p:nvSpPr>
@@ -25488,6 +26112,10 @@
           </a:solidFill>
           <a:ln/>
         </p:spPr>
+        <p:txBody>
+          <a:bodyPr/>
+          <a:p/>
+        </p:txBody>
       </p:sp>
       <p:sp>
         <p:nvSpPr>
@@ -25683,6 +26311,10 @@
             <a:prstDash val="solid"/>
           </a:ln>
         </p:spPr>
+        <p:txBody>
+          <a:bodyPr/>
+          <a:p/>
+        </p:txBody>
       </p:sp>
       <p:sp>
         <p:nvSpPr>
@@ -25834,6 +26466,10 @@
             <a:prstDash val="solid"/>
           </a:ln>
         </p:spPr>
+        <p:txBody>
+          <a:bodyPr/>
+          <a:p/>
+        </p:txBody>
       </p:sp>
       <p:sp>
         <p:nvSpPr>
@@ -25873,7 +26509,7 @@
                 <a:ea typeface="Georgia" pitchFamily="34" charset="-122"/>
                 <a:cs typeface="Georgia" pitchFamily="34" charset="-120"/>
               </a:rPr>
-              <a:t>83</a:t>
+              <a:t>102</a:t>
             </a:r>
             <a:endParaRPr lang="en-US" sz="5700" dirty="0"/>
           </a:p>
@@ -25955,7 +26591,7 @@
                 <a:ea typeface="Courier New" pitchFamily="34" charset="-122"/>
                 <a:cs typeface="Courier New" pitchFamily="34" charset="-120"/>
               </a:rPr>
-              <a:t>75 equities + 8 bond ETFs</a:t>
+              <a:t>94 equities + 8 bond ETFs</a:t>
             </a:r>
             <a:endParaRPr lang="en-US" sz="1950" dirty="0"/>
           </a:p>
@@ -25985,6 +26621,10 @@
             <a:prstDash val="solid"/>
           </a:ln>
         </p:spPr>
+        <p:txBody>
+          <a:bodyPr/>
+          <a:p/>
+        </p:txBody>
       </p:sp>
       <p:sp>
         <p:nvSpPr>
@@ -26136,6 +26776,10 @@
             <a:prstDash val="solid"/>
           </a:ln>
         </p:spPr>
+        <p:txBody>
+          <a:bodyPr/>
+          <a:p/>
+        </p:txBody>
       </p:sp>
       <p:sp>
         <p:nvSpPr>
@@ -26287,6 +26931,10 @@
             <a:prstDash val="solid"/>
           </a:ln>
         </p:spPr>
+        <p:txBody>
+          <a:bodyPr/>
+          <a:p/>
+        </p:txBody>
       </p:sp>
       <p:sp>
         <p:nvSpPr>
@@ -26438,6 +27086,10 @@
             <a:prstDash val="solid"/>
           </a:ln>
         </p:spPr>
+        <p:txBody>
+          <a:bodyPr/>
+          <a:p/>
+        </p:txBody>
       </p:sp>
       <p:sp>
         <p:nvSpPr>
@@ -26589,6 +27241,10 @@
             <a:prstDash val="solid"/>
           </a:ln>
         </p:spPr>
+        <p:txBody>
+          <a:bodyPr/>
+          <a:p/>
+        </p:txBody>
       </p:sp>
       <p:sp>
         <p:nvSpPr>
@@ -26740,6 +27396,10 @@
             <a:prstDash val="solid"/>
           </a:ln>
         </p:spPr>
+        <p:txBody>
+          <a:bodyPr/>
+          <a:p/>
+        </p:txBody>
       </p:sp>
       <p:sp>
         <p:nvSpPr>
@@ -27000,6 +27660,10 @@
           </a:solidFill>
           <a:ln/>
         </p:spPr>
+        <p:txBody>
+          <a:bodyPr/>
+          <a:p/>
+        </p:txBody>
       </p:sp>
       <p:sp>
         <p:nvSpPr>
@@ -27020,6 +27684,10 @@
           </a:solidFill>
           <a:ln/>
         </p:spPr>
+        <p:txBody>
+          <a:bodyPr/>
+          <a:p/>
+        </p:txBody>
       </p:sp>
       <p:sp>
         <p:nvSpPr>
@@ -27215,6 +27883,10 @@
             <a:prstDash val="solid"/>
           </a:ln>
         </p:spPr>
+        <p:txBody>
+          <a:bodyPr/>
+          <a:p/>
+        </p:txBody>
       </p:sp>
       <p:sp>
         <p:nvSpPr>
@@ -27235,6 +27907,10 @@
           </a:solidFill>
           <a:ln/>
         </p:spPr>
+        <p:txBody>
+          <a:bodyPr/>
+          <a:p/>
+        </p:txBody>
       </p:sp>
       <p:sp>
         <p:nvSpPr>
@@ -27386,6 +28062,10 @@
             <a:prstDash val="solid"/>
           </a:ln>
         </p:spPr>
+        <p:txBody>
+          <a:bodyPr/>
+          <a:p/>
+        </p:txBody>
       </p:sp>
       <p:sp>
         <p:nvSpPr>
@@ -27406,6 +28086,10 @@
           </a:solidFill>
           <a:ln/>
         </p:spPr>
+        <p:txBody>
+          <a:bodyPr/>
+          <a:p/>
+        </p:txBody>
       </p:sp>
       <p:sp>
         <p:nvSpPr>
@@ -27557,6 +28241,10 @@
             <a:prstDash val="solid"/>
           </a:ln>
         </p:spPr>
+        <p:txBody>
+          <a:bodyPr/>
+          <a:p/>
+        </p:txBody>
       </p:sp>
       <p:sp>
         <p:nvSpPr>
@@ -27577,6 +28265,10 @@
           </a:solidFill>
           <a:ln/>
         </p:spPr>
+        <p:txBody>
+          <a:bodyPr/>
+          <a:p/>
+        </p:txBody>
       </p:sp>
       <p:sp>
         <p:nvSpPr>
@@ -27728,6 +28420,10 @@
             <a:prstDash val="solid"/>
           </a:ln>
         </p:spPr>
+        <p:txBody>
+          <a:bodyPr/>
+          <a:p/>
+        </p:txBody>
       </p:sp>
       <p:sp>
         <p:nvSpPr>
@@ -27748,6 +28444,10 @@
           </a:solidFill>
           <a:ln/>
         </p:spPr>
+        <p:txBody>
+          <a:bodyPr/>
+          <a:p/>
+        </p:txBody>
       </p:sp>
       <p:sp>
         <p:nvSpPr>
@@ -27899,6 +28599,10 @@
             <a:prstDash val="solid"/>
           </a:ln>
         </p:spPr>
+        <p:txBody>
+          <a:bodyPr/>
+          <a:p/>
+        </p:txBody>
       </p:sp>
       <p:sp>
         <p:nvSpPr>
@@ -27919,6 +28623,10 @@
           </a:solidFill>
           <a:ln/>
         </p:spPr>
+        <p:txBody>
+          <a:bodyPr/>
+          <a:p/>
+        </p:txBody>
       </p:sp>
       <p:sp>
         <p:nvSpPr>
@@ -28070,6 +28778,10 @@
             <a:prstDash val="solid"/>
           </a:ln>
         </p:spPr>
+        <p:txBody>
+          <a:bodyPr/>
+          <a:p/>
+        </p:txBody>
       </p:sp>
       <p:sp>
         <p:nvSpPr>
@@ -28090,6 +28802,10 @@
           </a:solidFill>
           <a:ln/>
         </p:spPr>
+        <p:txBody>
+          <a:bodyPr/>
+          <a:p/>
+        </p:txBody>
       </p:sp>
       <p:sp>
         <p:nvSpPr>
@@ -28350,6 +29066,10 @@
           </a:solidFill>
           <a:ln/>
         </p:spPr>
+        <p:txBody>
+          <a:bodyPr/>
+          <a:p/>
+        </p:txBody>
       </p:sp>
       <p:sp>
         <p:nvSpPr>
@@ -28370,6 +29090,10 @@
           </a:solidFill>
           <a:ln/>
         </p:spPr>
+        <p:txBody>
+          <a:bodyPr/>
+          <a:p/>
+        </p:txBody>
       </p:sp>
       <p:sp>
         <p:nvSpPr>
@@ -28606,6 +29330,10 @@
             <a:prstDash val="solid"/>
           </a:ln>
         </p:spPr>
+        <p:txBody>
+          <a:bodyPr/>
+          <a:p/>
+        </p:txBody>
       </p:sp>
       <p:sp>
         <p:nvSpPr>
@@ -28716,6 +29444,10 @@
             <a:prstDash val="solid"/>
           </a:ln>
         </p:spPr>
+        <p:txBody>
+          <a:bodyPr/>
+          <a:p/>
+        </p:txBody>
       </p:sp>
       <p:sp>
         <p:nvSpPr>
@@ -28796,7 +29528,7 @@
                 <a:ea typeface="Arial" pitchFamily="34" charset="-122"/>
                 <a:cs typeface="Arial" pitchFamily="34" charset="-120"/>
               </a:rPr>
-              <a:t>Every 5 min we pull RSS feeds from six financial outlets (CNBC, Reuters, Yahoo Finance, CNN Business, MarketWatch, Seeking Alpha). Each headline is scored with VADER (a lexicon‑based sentiment model). We match headlines to tickers, take a 7‑day rolling average, z‑score it. Optionally re‑score with FinBERT, a finance‑tuned transformer, for headlines that mention a universe ticker.</a:t>
+              <a:t>Every 5 min we pull RSS feeds from five financial outlets (CNBC, Yahoo Finance, CNN Business, MarketWatch, Seeking Alpha). Each headline is scored with VADER. For headlines that tag a universe ticker we also scrape the full article body with trafilatura and re‑score per‑sentence, then take a 7‑day rolling z‑score. Optional FinBERT re‑score layered on top for the short‑list.</a:t>
             </a:r>
             <a:endParaRPr lang="en-US" sz="1950" dirty="0"/>
           </a:p>
@@ -28821,6 +29553,10 @@
           </a:solidFill>
           <a:ln/>
         </p:spPr>
+        <p:txBody>
+          <a:bodyPr/>
+          <a:p/>
+        </p:txBody>
       </p:sp>
       <p:sp>
         <p:nvSpPr>
@@ -28901,7 +29637,7 @@
                 <a:ea typeface="Arial" pitchFamily="34" charset="-122"/>
                 <a:cs typeface="Arial" pitchFamily="34" charset="-120"/>
               </a:rPr>
-              <a:t>CNBC, Reuters, Yahoo Finance, CNN Business, MarketWatch, Seeking Alpha</a:t>
+              <a:t>CNBC, Yahoo Finance, CNN Business, MarketWatch, Seeking Alpha</a:t>
             </a:r>
             <a:endParaRPr lang="en-US" sz="1950" dirty="0"/>
           </a:p>
@@ -28926,6 +29662,10 @@
           </a:solidFill>
           <a:ln/>
         </p:spPr>
+        <p:txBody>
+          <a:bodyPr/>
+          <a:p/>
+        </p:txBody>
       </p:sp>
       <p:sp>
         <p:nvSpPr>
@@ -29031,6 +29771,10 @@
           </a:solidFill>
           <a:ln/>
         </p:spPr>
+        <p:txBody>
+          <a:bodyPr/>
+          <a:p/>
+        </p:txBody>
       </p:sp>
       <p:sp>
         <p:nvSpPr>
@@ -29111,7 +29855,7 @@
                 <a:ea typeface="Arial" pitchFamily="34" charset="-122"/>
                 <a:cs typeface="Arial" pitchFamily="34" charset="-120"/>
               </a:rPr>
-              <a:t>VADER polarity → 7d rolling z‑score (FinBERT optional)</a:t>
+              <a:t>headline + scraped article body → per‑sentence VADER → 7d z‑score</a:t>
             </a:r>
             <a:endParaRPr lang="en-US" sz="1950" dirty="0"/>
           </a:p>
@@ -29136,6 +29880,10 @@
           </a:solidFill>
           <a:ln/>
         </p:spPr>
+        <p:txBody>
+          <a:bodyPr/>
+          <a:p/>
+        </p:txBody>
       </p:sp>
       <p:sp>
         <p:nvSpPr>
@@ -29246,6 +29994,10 @@
             <a:prstDash val="solid"/>
           </a:ln>
         </p:spPr>
+        <p:txBody>
+          <a:bodyPr/>
+          <a:p/>
+        </p:txBody>
       </p:sp>
       <p:sp>
         <p:nvSpPr>
@@ -29312,6 +30064,10 @@
             <a:prstDash val="solid"/>
           </a:ln>
         </p:spPr>
+        <p:txBody>
+          <a:bodyPr/>
+          <a:p/>
+        </p:txBody>
       </p:sp>
       <p:sp>
         <p:nvSpPr>
@@ -29332,6 +30088,10 @@
           </a:solidFill>
           <a:ln/>
         </p:spPr>
+        <p:txBody>
+          <a:bodyPr/>
+          <a:p/>
+        </p:txBody>
       </p:sp>
       <p:sp>
         <p:nvSpPr>
@@ -29466,6 +30226,10 @@
           </a:solidFill>
           <a:ln/>
         </p:spPr>
+        <p:txBody>
+          <a:bodyPr/>
+          <a:p/>
+        </p:txBody>
       </p:sp>
       <p:sp>
         <p:nvSpPr>
@@ -29486,6 +30250,10 @@
           </a:solidFill>
           <a:ln/>
         </p:spPr>
+        <p:txBody>
+          <a:bodyPr/>
+          <a:p/>
+        </p:txBody>
       </p:sp>
       <p:sp>
         <p:nvSpPr>
@@ -29722,6 +30490,10 @@
             <a:prstDash val="solid"/>
           </a:ln>
         </p:spPr>
+        <p:txBody>
+          <a:bodyPr/>
+          <a:p/>
+        </p:txBody>
       </p:sp>
       <p:sp>
         <p:nvSpPr>
@@ -29832,6 +30604,10 @@
             <a:prstDash val="solid"/>
           </a:ln>
         </p:spPr>
+        <p:txBody>
+          <a:bodyPr/>
+          <a:p/>
+        </p:txBody>
       </p:sp>
       <p:sp>
         <p:nvSpPr>
@@ -29937,6 +30713,10 @@
           </a:solidFill>
           <a:ln/>
         </p:spPr>
+        <p:txBody>
+          <a:bodyPr/>
+          <a:p/>
+        </p:txBody>
       </p:sp>
       <p:sp>
         <p:nvSpPr>
@@ -30042,6 +30822,10 @@
           </a:solidFill>
           <a:ln/>
         </p:spPr>
+        <p:txBody>
+          <a:bodyPr/>
+          <a:p/>
+        </p:txBody>
       </p:sp>
       <p:sp>
         <p:nvSpPr>
@@ -30147,6 +30931,10 @@
           </a:solidFill>
           <a:ln/>
         </p:spPr>
+        <p:txBody>
+          <a:bodyPr/>
+          <a:p/>
+        </p:txBody>
       </p:sp>
       <p:sp>
         <p:nvSpPr>
@@ -30252,6 +31040,10 @@
           </a:solidFill>
           <a:ln/>
         </p:spPr>
+        <p:txBody>
+          <a:bodyPr/>
+          <a:p/>
+        </p:txBody>
       </p:sp>
       <p:sp>
         <p:nvSpPr>
@@ -30362,6 +31154,10 @@
             <a:prstDash val="solid"/>
           </a:ln>
         </p:spPr>
+        <p:txBody>
+          <a:bodyPr/>
+          <a:p/>
+        </p:txBody>
       </p:sp>
       <p:sp>
         <p:nvSpPr>
@@ -30428,6 +31224,10 @@
             <a:prstDash val="solid"/>
           </a:ln>
         </p:spPr>
+        <p:txBody>
+          <a:bodyPr/>
+          <a:p/>
+        </p:txBody>
       </p:sp>
       <p:sp>
         <p:nvSpPr>
@@ -30448,6 +31248,10 @@
           </a:solidFill>
           <a:ln/>
         </p:spPr>
+        <p:txBody>
+          <a:bodyPr/>
+          <a:p/>
+        </p:txBody>
       </p:sp>
       <p:sp>
         <p:nvSpPr>
@@ -30582,6 +31386,10 @@
           </a:solidFill>
           <a:ln/>
         </p:spPr>
+        <p:txBody>
+          <a:bodyPr/>
+          <a:p/>
+        </p:txBody>
       </p:sp>
       <p:sp>
         <p:nvSpPr>
@@ -30602,6 +31410,10 @@
           </a:solidFill>
           <a:ln/>
         </p:spPr>
+        <p:txBody>
+          <a:bodyPr/>
+          <a:p/>
+        </p:txBody>
       </p:sp>
       <p:sp>
         <p:nvSpPr>
@@ -30838,6 +31650,10 @@
             <a:prstDash val="solid"/>
           </a:ln>
         </p:spPr>
+        <p:txBody>
+          <a:bodyPr/>
+          <a:p/>
+        </p:txBody>
       </p:sp>
       <p:sp>
         <p:nvSpPr>
@@ -30948,6 +31764,10 @@
             <a:prstDash val="solid"/>
           </a:ln>
         </p:spPr>
+        <p:txBody>
+          <a:bodyPr/>
+          <a:p/>
+        </p:txBody>
       </p:sp>
       <p:sp>
         <p:nvSpPr>
@@ -31053,6 +31873,10 @@
           </a:solidFill>
           <a:ln/>
         </p:spPr>
+        <p:txBody>
+          <a:bodyPr/>
+          <a:p/>
+        </p:txBody>
       </p:sp>
       <p:sp>
         <p:nvSpPr>
@@ -31158,6 +31982,10 @@
           </a:solidFill>
           <a:ln/>
         </p:spPr>
+        <p:txBody>
+          <a:bodyPr/>
+          <a:p/>
+        </p:txBody>
       </p:sp>
       <p:sp>
         <p:nvSpPr>
@@ -31263,6 +32091,10 @@
           </a:solidFill>
           <a:ln/>
         </p:spPr>
+        <p:txBody>
+          <a:bodyPr/>
+          <a:p/>
+        </p:txBody>
       </p:sp>
       <p:sp>
         <p:nvSpPr>
@@ -31368,6 +32200,10 @@
           </a:solidFill>
           <a:ln/>
         </p:spPr>
+        <p:txBody>
+          <a:bodyPr/>
+          <a:p/>
+        </p:txBody>
       </p:sp>
       <p:sp>
         <p:nvSpPr>
@@ -31478,6 +32314,10 @@
             <a:prstDash val="solid"/>
           </a:ln>
         </p:spPr>
+        <p:txBody>
+          <a:bodyPr/>
+          <a:p/>
+        </p:txBody>
       </p:sp>
       <p:sp>
         <p:nvSpPr>
@@ -31544,6 +32384,10 @@
             <a:prstDash val="solid"/>
           </a:ln>
         </p:spPr>
+        <p:txBody>
+          <a:bodyPr/>
+          <a:p/>
+        </p:txBody>
       </p:sp>
       <p:sp>
         <p:nvSpPr>
@@ -31564,6 +32408,10 @@
           </a:solidFill>
           <a:ln/>
         </p:spPr>
+        <p:txBody>
+          <a:bodyPr/>
+          <a:p/>
+        </p:txBody>
       </p:sp>
       <p:sp>
         <p:nvSpPr>
